--- a/Data_Pipeline_Simple_Overview.pptx
+++ b/Data_Pipeline_Simple_Overview.pptx
@@ -3468,8 +3468,8 @@
         </p:nvSpPr>
         <p:spPr>
           <a:xfrm>
-            <a:off x="9001431" y="4630198"/>
-            <a:ext cx="8035413" cy="523220"/>
+            <a:off x="9001432" y="4630198"/>
+            <a:ext cx="2282868" cy="523220"/>
           </a:xfrm>
           <a:prstGeom prst="rect">
             <a:avLst/>
@@ -3503,13 +3503,13 @@
   <p:clrMapOvr>
     <a:masterClrMapping/>
   </p:clrMapOvr>
-  <mc:AlternateContent xmlns:mc="http://schemas.openxmlformats.org/markup-compatibility/2006">
-    <mc:Choice xmlns:p14="http://schemas.microsoft.com/office/powerpoint/2010/main" Requires="p14">
+  <mc:AlternateContent xmlns:mc="http://schemas.openxmlformats.org/markup-compatibility/2006" xmlns:p14="http://schemas.microsoft.com/office/powerpoint/2010/main">
+    <mc:Choice Requires="p14">
       <p:transition spd="slow" p14:dur="1500">
         <p:split orient="vert"/>
       </p:transition>
     </mc:Choice>
-    <mc:Fallback>
+    <mc:Fallback xmlns="">
       <p:transition spd="slow">
         <p:split orient="vert"/>
       </p:transition>
@@ -4371,13 +4371,13 @@
   <p:clrMapOvr>
     <a:masterClrMapping/>
   </p:clrMapOvr>
-  <mc:AlternateContent xmlns:mc="http://schemas.openxmlformats.org/markup-compatibility/2006">
-    <mc:Choice xmlns:p14="http://schemas.microsoft.com/office/powerpoint/2010/main" Requires="p14">
+  <mc:AlternateContent xmlns:mc="http://schemas.openxmlformats.org/markup-compatibility/2006" xmlns:p14="http://schemas.microsoft.com/office/powerpoint/2010/main">
+    <mc:Choice Requires="p14">
       <p:transition spd="slow" p14:dur="1500">
         <p:split orient="vert"/>
       </p:transition>
     </mc:Choice>
-    <mc:Fallback>
+    <mc:Fallback xmlns="">
       <p:transition spd="slow">
         <p:split orient="vert"/>
       </p:transition>
@@ -5356,13 +5356,13 @@
   <p:clrMapOvr>
     <a:masterClrMapping/>
   </p:clrMapOvr>
-  <mc:AlternateContent xmlns:mc="http://schemas.openxmlformats.org/markup-compatibility/2006">
-    <mc:Choice xmlns:p14="http://schemas.microsoft.com/office/powerpoint/2010/main" Requires="p14">
+  <mc:AlternateContent xmlns:mc="http://schemas.openxmlformats.org/markup-compatibility/2006" xmlns:p14="http://schemas.microsoft.com/office/powerpoint/2010/main">
+    <mc:Choice Requires="p14">
       <p:transition spd="slow" p14:dur="1500">
         <p:split orient="vert"/>
       </p:transition>
     </mc:Choice>
-    <mc:Fallback>
+    <mc:Fallback xmlns="">
       <p:transition spd="slow">
         <p:split orient="vert"/>
       </p:transition>
@@ -7157,13 +7157,13 @@
   <p:clrMapOvr>
     <a:masterClrMapping/>
   </p:clrMapOvr>
-  <mc:AlternateContent xmlns:mc="http://schemas.openxmlformats.org/markup-compatibility/2006">
-    <mc:Choice xmlns:p14="http://schemas.microsoft.com/office/powerpoint/2010/main" Requires="p14">
+  <mc:AlternateContent xmlns:mc="http://schemas.openxmlformats.org/markup-compatibility/2006" xmlns:p14="http://schemas.microsoft.com/office/powerpoint/2010/main">
+    <mc:Choice Requires="p14">
       <p:transition spd="slow" p14:dur="1500">
         <p:split orient="vert"/>
       </p:transition>
     </mc:Choice>
-    <mc:Fallback>
+    <mc:Fallback xmlns="">
       <p:transition spd="slow">
         <p:split orient="vert"/>
       </p:transition>
@@ -8528,13 +8528,13 @@
   <p:clrMapOvr>
     <a:masterClrMapping/>
   </p:clrMapOvr>
-  <mc:AlternateContent xmlns:mc="http://schemas.openxmlformats.org/markup-compatibility/2006">
-    <mc:Choice xmlns:p14="http://schemas.microsoft.com/office/powerpoint/2010/main" Requires="p14">
+  <mc:AlternateContent xmlns:mc="http://schemas.openxmlformats.org/markup-compatibility/2006" xmlns:p14="http://schemas.microsoft.com/office/powerpoint/2010/main">
+    <mc:Choice Requires="p14">
       <p:transition spd="slow" p14:dur="1500">
         <p:split orient="vert"/>
       </p:transition>
     </mc:Choice>
-    <mc:Fallback>
+    <mc:Fallback xmlns="">
       <p:transition spd="slow">
         <p:split orient="vert"/>
       </p:transition>
@@ -9198,7 +9198,7 @@
         <p:spPr>
           <a:xfrm>
             <a:off x="5334000" y="3619500"/>
-            <a:ext cx="6477000" cy="2308324"/>
+            <a:ext cx="6477000" cy="2677656"/>
           </a:xfrm>
           <a:prstGeom prst="rect">
             <a:avLst/>
@@ -9218,9 +9218,55 @@
                 </a:solidFill>
               </a:rPr>
               <a:t>Active Product: 962
-Empty Lifecycle: 285
+Empty Lifecycle: 285</a:t>
+            </a:r>
+            <a:endParaRPr lang="sk-SK" sz="2400" dirty="0">
+              <a:solidFill>
+                <a:srgbClr val="1F1F1F"/>
+              </a:solidFill>
+            </a:endParaRPr>
+          </a:p>
+          <a:p>
+            <a:r>
+              <a:rPr lang="en-US" sz="2400" dirty="0">
+                <a:solidFill>
+                  <a:srgbClr val="1F1F1F"/>
+                </a:solidFill>
+              </a:rPr>
+              <a:t>
 Obsolete-like classes:
-- Prod. Cancellation
+- Prod. Cancellation</a:t>
+            </a:r>
+            <a:endParaRPr lang="sk-SK" sz="2400" dirty="0">
+              <a:solidFill>
+                <a:srgbClr val="1F1F1F"/>
+              </a:solidFill>
+            </a:endParaRPr>
+          </a:p>
+          <a:p>
+            <a:r>
+              <a:rPr lang="en-US" sz="2400" dirty="0">
+                <a:solidFill>
+                  <a:srgbClr val="1F1F1F"/>
+                </a:solidFill>
+              </a:rPr>
+              <a:t>- Prod. </a:t>
+            </a:r>
+            <a:r>
+              <a:rPr lang="en-US" sz="2400" dirty="0" err="1">
+                <a:solidFill>
+                  <a:srgbClr val="1F1F1F"/>
+                </a:solidFill>
+              </a:rPr>
+              <a:t>Discont</a:t>
+            </a:r>
+            <a:r>
+              <a:rPr lang="en-US" sz="2400" dirty="0">
+                <a:solidFill>
+                  <a:srgbClr val="1F1F1F"/>
+                </a:solidFill>
+              </a:rPr>
+              <a:t>. 
 - End </a:t>
             </a:r>
             <a:r>
@@ -9230,23 +9276,6 @@
                 </a:solidFill>
               </a:rPr>
               <a:t>Prod.Lifecycl</a:t>
-            </a:r>
-            <a:r>
-              <a:rPr lang="en-US" sz="2400" dirty="0">
-                <a:solidFill>
-                  <a:srgbClr val="1F1F1F"/>
-                </a:solidFill>
-              </a:rPr>
-              <a:t>.
-- Prod. </a:t>
-            </a:r>
-            <a:r>
-              <a:rPr lang="en-US" sz="2400" dirty="0" err="1">
-                <a:solidFill>
-                  <a:srgbClr val="1F1F1F"/>
-                </a:solidFill>
-              </a:rPr>
-              <a:t>Discont</a:t>
             </a:r>
             <a:r>
               <a:rPr lang="en-US" sz="2400" dirty="0">
@@ -9269,13 +9298,13 @@
   <p:clrMapOvr>
     <a:masterClrMapping/>
   </p:clrMapOvr>
-  <mc:AlternateContent xmlns:mc="http://schemas.openxmlformats.org/markup-compatibility/2006">
-    <mc:Choice xmlns:p14="http://schemas.microsoft.com/office/powerpoint/2010/main" Requires="p14">
+  <mc:AlternateContent xmlns:mc="http://schemas.openxmlformats.org/markup-compatibility/2006" xmlns:p14="http://schemas.microsoft.com/office/powerpoint/2010/main">
+    <mc:Choice Requires="p14">
       <p:transition spd="slow" p14:dur="1500">
         <p:split orient="vert"/>
       </p:transition>
     </mc:Choice>
-    <mc:Fallback>
+    <mc:Fallback xmlns="">
       <p:transition spd="slow">
         <p:split orient="vert"/>
       </p:transition>
